--- a/site/clases/parte-2-deep-learning/174-entrenamiento-a-escala-con-vertex-ai/clase-174-entrenamiento-a-escala-con-vertex-ai-presentacion.pptx
+++ b/site/clases/parte-2-deep-learning/174-entrenamiento-a-escala-con-vertex-ai/clase-174-entrenamiento-a-escala-con-vertex-ai-presentacion.pptx
@@ -3272,7 +3272,7 @@
                 </a:solidFill>
                 <a:latin typeface="Segoe UI"/>
               </a:rPr>
-              <a:t>Parte: 2 — Deep Learning · Fuente: Géron, cap. 19 § Running Large Training Jobs on Vertex AI + docs Vertex AI Training.  Duración estimada: 65 min.</a:t>
+              <a:t>Parte: 2 — Deep Learning · Fuente: Géron, cap. 19 § Running Large Training Jobs on Vertex AI + docs Vertex AI Training.  Duración estimada: 65 min. · Nivel: Avanzado</a:t>
             </a:r>
           </a:p>
         </p:txBody>
@@ -3581,7 +3581,7 @@
                 </a:solidFill>
                 <a:latin typeface="Segoe UI"/>
               </a:rPr>
-              <a:t>Parte: 2 — Deep Learning · Fuente: Géron, cap. 19 § Running Large Training Jobs on Vertex AI + docs Vertex AI Training.  Duración estimada: 65 min.</a:t>
+              <a:t>Parte: 2 — Deep Learning · Fuente: Géron, cap. 19 § Running Large Training Jobs on Vertex AI + docs Vertex AI Training.  Duración estimada: 65 min. · Nivel: Avanzado</a:t>
             </a:r>
           </a:p>
         </p:txBody>
@@ -4910,7 +4910,387 @@
                 </a:solidFill>
                 <a:latin typeface="Courier New"/>
               </a:rPr>
-              <a:t># Imports y configuración inicial</a:t>
+              <a:t>try:</a:t>
+            </a:r>
+          </a:p>
+          <a:p>
+            <a:pPr>
+              <a:defRPr sz="1200" b="0">
+                <a:solidFill>
+                  <a:srgbClr val="F8FAFC"/>
+                </a:solidFill>
+                <a:latin typeface="Courier New"/>
+              </a:defRPr>
+            </a:pPr>
+            <a:r>
+              <a:rPr sz="1200" b="0">
+                <a:solidFill>
+                  <a:srgbClr val="F8FAFC"/>
+                </a:solidFill>
+                <a:latin typeface="Courier New"/>
+              </a:rPr>
+              <a:t>    from google.cloud import aiplatform</a:t>
+            </a:r>
+          </a:p>
+          <a:p>
+            <a:pPr>
+              <a:defRPr sz="1200" b="0">
+                <a:solidFill>
+                  <a:srgbClr val="F8FAFC"/>
+                </a:solidFill>
+                <a:latin typeface="Courier New"/>
+              </a:defRPr>
+            </a:pPr>
+            <a:r>
+              <a:rPr sz="1200" b="0">
+                <a:solidFill>
+                  <a:srgbClr val="F8FAFC"/>
+                </a:solidFill>
+                <a:latin typeface="Courier New"/>
+              </a:rPr>
+              <a:t>    GCP_OK = True</a:t>
+            </a:r>
+          </a:p>
+          <a:p>
+            <a:pPr>
+              <a:defRPr sz="1200" b="0">
+                <a:solidFill>
+                  <a:srgbClr val="F8FAFC"/>
+                </a:solidFill>
+                <a:latin typeface="Courier New"/>
+              </a:defRPr>
+            </a:pPr>
+            <a:r>
+              <a:rPr sz="1200" b="0">
+                <a:solidFill>
+                  <a:srgbClr val="F8FAFC"/>
+                </a:solidFill>
+                <a:latin typeface="Courier New"/>
+              </a:rPr>
+              <a:t>except Exception:</a:t>
+            </a:r>
+          </a:p>
+          <a:p>
+            <a:pPr>
+              <a:defRPr sz="1200" b="0">
+                <a:solidFill>
+                  <a:srgbClr val="F8FAFC"/>
+                </a:solidFill>
+                <a:latin typeface="Courier New"/>
+              </a:defRPr>
+            </a:pPr>
+            <a:r>
+              <a:rPr sz="1200" b="0">
+                <a:solidFill>
+                  <a:srgbClr val="F8FAFC"/>
+                </a:solidFill>
+                <a:latin typeface="Courier New"/>
+              </a:rPr>
+              <a:t>    GCP_OK = False</a:t>
+            </a:r>
+          </a:p>
+          <a:p>
+            <a:pPr>
+              <a:defRPr sz="1200" b="0">
+                <a:solidFill>
+                  <a:srgbClr val="F8FAFC"/>
+                </a:solidFill>
+                <a:latin typeface="Courier New"/>
+              </a:defRPr>
+            </a:pPr>
+            <a:r>
+              <a:rPr sz="1200" b="0">
+                <a:solidFill>
+                  <a:srgbClr val="F8FAFC"/>
+                </a:solidFill>
+                <a:latin typeface="Courier New"/>
+              </a:rPr>
+              <a:t>    print("google-cloud-aiplatform no instalado -&gt; se muestra la API (no se ejecuta)")</a:t>
+            </a:r>
+          </a:p>
+          <a:p>
+            <a:pPr>
+              <a:defRPr sz="1200" b="0">
+                <a:solidFill>
+                  <a:srgbClr val="F8FAFC"/>
+                </a:solidFill>
+                <a:latin typeface="Courier New"/>
+              </a:defRPr>
+            </a:pPr>
+            <a:r>
+              <a:rPr sz="1200" b="0">
+                <a:solidFill>
+                  <a:srgbClr val="F8FAFC"/>
+                </a:solidFill>
+                <a:latin typeface="Courier New"/>
+              </a:rPr>
+              <a:t> </a:t>
+            </a:r>
+          </a:p>
+          <a:p>
+            <a:pPr>
+              <a:defRPr sz="1200" b="0">
+                <a:solidFill>
+                  <a:srgbClr val="F8FAFC"/>
+                </a:solidFill>
+                <a:latin typeface="Courier New"/>
+              </a:defRPr>
+            </a:pPr>
+            <a:r>
+              <a:rPr sz="1200" b="0">
+                <a:solidFill>
+                  <a:srgbClr val="F8FAFC"/>
+                </a:solidFill>
+                <a:latin typeface="Courier New"/>
+              </a:rPr>
+              <a:t>IMAGE = "us-central1-docker.pkg.dev/PROY/repo/train:v1"</a:t>
+            </a:r>
+          </a:p>
+          <a:p>
+            <a:pPr>
+              <a:defRPr sz="1200" b="0">
+                <a:solidFill>
+                  <a:srgbClr val="F8FAFC"/>
+                </a:solidFill>
+                <a:latin typeface="Courier New"/>
+              </a:defRPr>
+            </a:pPr>
+            <a:r>
+              <a:rPr sz="1200" b="0">
+                <a:solidFill>
+                  <a:srgbClr val="F8FAFC"/>
+                </a:solidFill>
+                <a:latin typeface="Courier New"/>
+              </a:rPr>
+              <a:t>worker_pool_specs = [{</a:t>
+            </a:r>
+          </a:p>
+          <a:p>
+            <a:pPr>
+              <a:defRPr sz="1200" b="0">
+                <a:solidFill>
+                  <a:srgbClr val="F8FAFC"/>
+                </a:solidFill>
+                <a:latin typeface="Courier New"/>
+              </a:defRPr>
+            </a:pPr>
+            <a:r>
+              <a:rPr sz="1200" b="0">
+                <a:solidFill>
+                  <a:srgbClr val="F8FAFC"/>
+                </a:solidFill>
+                <a:latin typeface="Courier New"/>
+              </a:rPr>
+              <a:t>    "machine_spec": {"machine_type": "n1-standard-8",</a:t>
+            </a:r>
+          </a:p>
+          <a:p>
+            <a:pPr>
+              <a:defRPr sz="1200" b="0">
+                <a:solidFill>
+                  <a:srgbClr val="F8FAFC"/>
+                </a:solidFill>
+                <a:latin typeface="Courier New"/>
+              </a:defRPr>
+            </a:pPr>
+            <a:r>
+              <a:rPr sz="1200" b="0">
+                <a:solidFill>
+                  <a:srgbClr val="F8FAFC"/>
+                </a:solidFill>
+                <a:latin typeface="Courier New"/>
+              </a:rPr>
+              <a:t>                     "accelerator_type": "NVIDIA_TESLA_T4",</a:t>
+            </a:r>
+          </a:p>
+          <a:p>
+            <a:pPr>
+              <a:defRPr sz="1200" b="0">
+                <a:solidFill>
+                  <a:srgbClr val="F8FAFC"/>
+                </a:solidFill>
+                <a:latin typeface="Courier New"/>
+              </a:defRPr>
+            </a:pPr>
+            <a:r>
+              <a:rPr sz="1200" b="0">
+                <a:solidFill>
+                  <a:srgbClr val="F8FAFC"/>
+                </a:solidFill>
+                <a:latin typeface="Courier New"/>
+              </a:rPr>
+              <a:t>                     "accelerator_count": 1},</a:t>
+            </a:r>
+          </a:p>
+          <a:p>
+            <a:pPr>
+              <a:defRPr sz="1200" b="0">
+                <a:solidFill>
+                  <a:srgbClr val="F8FAFC"/>
+                </a:solidFill>
+                <a:latin typeface="Courier New"/>
+              </a:defRPr>
+            </a:pPr>
+            <a:r>
+              <a:rPr sz="1200" b="0">
+                <a:solidFill>
+                  <a:srgbClr val="F8FAFC"/>
+                </a:solidFill>
+                <a:latin typeface="Courier New"/>
+              </a:rPr>
+              <a:t>    "replica_count": 1,</a:t>
+            </a:r>
+          </a:p>
+          <a:p>
+            <a:pPr>
+              <a:defRPr sz="1200" b="0">
+                <a:solidFill>
+                  <a:srgbClr val="F8FAFC"/>
+                </a:solidFill>
+                <a:latin typeface="Courier New"/>
+              </a:defRPr>
+            </a:pPr>
+            <a:r>
+              <a:rPr sz="1200" b="0">
+                <a:solidFill>
+                  <a:srgbClr val="F8FAFC"/>
+                </a:solidFill>
+                <a:latin typeface="Courier New"/>
+              </a:rPr>
+              <a:t>    "container_spec": {"image_uri": IMAGE},</a:t>
+            </a:r>
+          </a:p>
+          <a:p>
+            <a:pPr>
+              <a:defRPr sz="1200" b="0">
+                <a:solidFill>
+                  <a:srgbClr val="F8FAFC"/>
+                </a:solidFill>
+                <a:latin typeface="Courier New"/>
+              </a:defRPr>
+            </a:pPr>
+            <a:r>
+              <a:rPr sz="1200" b="0">
+                <a:solidFill>
+                  <a:srgbClr val="F8FAFC"/>
+                </a:solidFill>
+                <a:latin typeface="Courier New"/>
+              </a:rPr>
+              <a:t>}]</a:t>
+            </a:r>
+          </a:p>
+          <a:p>
+            <a:pPr>
+              <a:defRPr sz="1200" b="0">
+                <a:solidFill>
+                  <a:srgbClr val="F8FAFC"/>
+                </a:solidFill>
+                <a:latin typeface="Courier New"/>
+              </a:defRPr>
+            </a:pPr>
+            <a:r>
+              <a:rPr sz="1200" b="0">
+                <a:solidFill>
+                  <a:srgbClr val="F8FAFC"/>
+                </a:solidFill>
+                <a:latin typeface="Courier New"/>
+              </a:rPr>
+              <a:t> </a:t>
+            </a:r>
+          </a:p>
+          <a:p>
+            <a:pPr>
+              <a:defRPr sz="1200" b="0">
+                <a:solidFill>
+                  <a:srgbClr val="F8FAFC"/>
+                </a:solidFill>
+                <a:latin typeface="Courier New"/>
+              </a:defRPr>
+            </a:pPr>
+            <a:r>
+              <a:rPr sz="1200" b="0">
+                <a:solidFill>
+                  <a:srgbClr val="F8FAFC"/>
+                </a:solidFill>
+                <a:latin typeface="Courier New"/>
+              </a:rPr>
+              <a:t>if GCP_OK:</a:t>
+            </a:r>
+          </a:p>
+          <a:p>
+            <a:pPr>
+              <a:defRPr sz="1200" b="0">
+                <a:solidFill>
+                  <a:srgbClr val="F8FAFC"/>
+                </a:solidFill>
+                <a:latin typeface="Courier New"/>
+              </a:defRPr>
+            </a:pPr>
+            <a:r>
+              <a:rPr sz="1200" b="0">
+                <a:solidFill>
+                  <a:srgbClr val="F8FAFC"/>
+                </a:solidFill>
+                <a:latin typeface="Courier New"/>
+              </a:rPr>
+              <a:t>    aiplatform.init(project="mi-proyecto", location="us-central1")</a:t>
+            </a:r>
+          </a:p>
+          <a:p>
+            <a:pPr>
+              <a:defRPr sz="1200" b="0">
+                <a:solidFill>
+                  <a:srgbClr val="F8FAFC"/>
+                </a:solidFill>
+                <a:latin typeface="Courier New"/>
+              </a:defRPr>
+            </a:pPr>
+            <a:r>
+              <a:rPr sz="1200" b="0">
+                <a:solidFill>
+                  <a:srgbClr val="F8FAFC"/>
+                </a:solidFill>
+                <a:latin typeface="Courier New"/>
+              </a:rPr>
+              <a:t>    job = aiplatform.CustomJob(display_name="fashion-exp1",</a:t>
+            </a:r>
+          </a:p>
+          <a:p>
+            <a:pPr>
+              <a:defRPr sz="1200" b="0">
+                <a:solidFill>
+                  <a:srgbClr val="F8FAFC"/>
+                </a:solidFill>
+                <a:latin typeface="Courier New"/>
+              </a:defRPr>
+            </a:pPr>
+            <a:r>
+              <a:rPr sz="1200" b="0">
+                <a:solidFill>
+                  <a:srgbClr val="F8FAFC"/>
+                </a:solidFill>
+                <a:latin typeface="Courier New"/>
+              </a:rPr>
+              <a:t>                               worker_pool_specs=worker_pool_specs)</a:t>
+            </a:r>
+          </a:p>
+          <a:p>
+            <a:pPr>
+              <a:defRPr sz="1200" b="0">
+                <a:solidFill>
+                  <a:srgbClr val="F8FAFC"/>
+                </a:solidFill>
+                <a:latin typeface="Courier New"/>
+              </a:defRPr>
+            </a:pPr>
+            <a:r>
+              <a:rPr sz="1200" b="0">
+                <a:solidFill>
+                  <a:srgbClr val="F8FAFC"/>
+                </a:solidFill>
+                <a:latin typeface="Courier New"/>
+              </a:rPr>
+              <a:t># ... (truncado)</a:t>
             </a:r>
           </a:p>
         </p:txBody>
